--- a/Backend/services/pptx-generator-service/slides/quadra_poli/secao_iluminacao.pptx
+++ b/Backend/services/pptx-generator-service/slides/quadra_poli/secao_iluminacao.pptx
@@ -115,7 +115,7 @@
 <file path=ppt/revisionInfo.xml><?xml version="1.0" encoding="utf-8"?>
 <p1510:revInfo xmlns:a="http://schemas.openxmlformats.org/drawingml/2006/main" xmlns:r="http://schemas.openxmlformats.org/officeDocument/2006/relationships" xmlns:p1510="http://schemas.microsoft.com/office/powerpoint/2015/10/main">
   <p1510:revLst>
-    <p1510:client id="{8073F864-63E8-4A20-C1C2-C1125AA9CA9F}" v="52" dt="2026-05-19T23:05:21.323"/>
+    <p1510:client id="{2419D518-A360-EFAB-56AF-C764D7DBC237}" v="10" dt="2026-05-25T17:18:40.303"/>
   </p1510:revLst>
 </p1510:revInfo>
 </file>
@@ -251,7 +251,7 @@
           <a:p>
             <a:fld id="{F0E51C7C-CEA3-4CAA-BE4B-344879E7C377}" type="datetimeFigureOut">
               <a:rPr lang="de-DE" smtClean="0"/>
-              <a:t>19.05.2026</a:t>
+              <a:t>25.05.2026</a:t>
             </a:fld>
             <a:endParaRPr lang="de-DE"/>
           </a:p>
@@ -421,7 +421,7 @@
           <a:p>
             <a:fld id="{F0E51C7C-CEA3-4CAA-BE4B-344879E7C377}" type="datetimeFigureOut">
               <a:rPr lang="de-DE" smtClean="0"/>
-              <a:t>19.05.2026</a:t>
+              <a:t>25.05.2026</a:t>
             </a:fld>
             <a:endParaRPr lang="de-DE"/>
           </a:p>
@@ -601,7 +601,7 @@
           <a:p>
             <a:fld id="{F0E51C7C-CEA3-4CAA-BE4B-344879E7C377}" type="datetimeFigureOut">
               <a:rPr lang="de-DE" smtClean="0"/>
-              <a:t>19.05.2026</a:t>
+              <a:t>25.05.2026</a:t>
             </a:fld>
             <a:endParaRPr lang="de-DE"/>
           </a:p>
@@ -771,7 +771,7 @@
           <a:p>
             <a:fld id="{F0E51C7C-CEA3-4CAA-BE4B-344879E7C377}" type="datetimeFigureOut">
               <a:rPr lang="de-DE" smtClean="0"/>
-              <a:t>19.05.2026</a:t>
+              <a:t>25.05.2026</a:t>
             </a:fld>
             <a:endParaRPr lang="de-DE"/>
           </a:p>
@@ -1017,7 +1017,7 @@
           <a:p>
             <a:fld id="{F0E51C7C-CEA3-4CAA-BE4B-344879E7C377}" type="datetimeFigureOut">
               <a:rPr lang="de-DE" smtClean="0"/>
-              <a:t>19.05.2026</a:t>
+              <a:t>25.05.2026</a:t>
             </a:fld>
             <a:endParaRPr lang="de-DE"/>
           </a:p>
@@ -1249,7 +1249,7 @@
           <a:p>
             <a:fld id="{F0E51C7C-CEA3-4CAA-BE4B-344879E7C377}" type="datetimeFigureOut">
               <a:rPr lang="de-DE" smtClean="0"/>
-              <a:t>19.05.2026</a:t>
+              <a:t>25.05.2026</a:t>
             </a:fld>
             <a:endParaRPr lang="de-DE"/>
           </a:p>
@@ -1616,7 +1616,7 @@
           <a:p>
             <a:fld id="{F0E51C7C-CEA3-4CAA-BE4B-344879E7C377}" type="datetimeFigureOut">
               <a:rPr lang="de-DE" smtClean="0"/>
-              <a:t>19.05.2026</a:t>
+              <a:t>25.05.2026</a:t>
             </a:fld>
             <a:endParaRPr lang="de-DE"/>
           </a:p>
@@ -1734,7 +1734,7 @@
           <a:p>
             <a:fld id="{F0E51C7C-CEA3-4CAA-BE4B-344879E7C377}" type="datetimeFigureOut">
               <a:rPr lang="de-DE" smtClean="0"/>
-              <a:t>19.05.2026</a:t>
+              <a:t>25.05.2026</a:t>
             </a:fld>
             <a:endParaRPr lang="de-DE"/>
           </a:p>
@@ -1829,7 +1829,7 @@
           <a:p>
             <a:fld id="{F0E51C7C-CEA3-4CAA-BE4B-344879E7C377}" type="datetimeFigureOut">
               <a:rPr lang="de-DE" smtClean="0"/>
-              <a:t>19.05.2026</a:t>
+              <a:t>25.05.2026</a:t>
             </a:fld>
             <a:endParaRPr lang="de-DE"/>
           </a:p>
@@ -2106,7 +2106,7 @@
           <a:p>
             <a:fld id="{F0E51C7C-CEA3-4CAA-BE4B-344879E7C377}" type="datetimeFigureOut">
               <a:rPr lang="de-DE" smtClean="0"/>
-              <a:t>19.05.2026</a:t>
+              <a:t>25.05.2026</a:t>
             </a:fld>
             <a:endParaRPr lang="de-DE"/>
           </a:p>
@@ -2359,7 +2359,7 @@
           <a:p>
             <a:fld id="{F0E51C7C-CEA3-4CAA-BE4B-344879E7C377}" type="datetimeFigureOut">
               <a:rPr lang="de-DE" smtClean="0"/>
-              <a:t>19.05.2026</a:t>
+              <a:t>25.05.2026</a:t>
             </a:fld>
             <a:endParaRPr lang="de-DE"/>
           </a:p>
@@ -2572,7 +2572,7 @@
           <a:p>
             <a:fld id="{F0E51C7C-CEA3-4CAA-BE4B-344879E7C377}" type="datetimeFigureOut">
               <a:rPr lang="de-DE" smtClean="0"/>
-              <a:t>19.05.2026</a:t>
+              <a:t>25.05.2026</a:t>
             </a:fld>
             <a:endParaRPr lang="de-DE"/>
           </a:p>
@@ -3191,7 +3191,7 @@
               <a:t>{{ </a:t>
             </a:r>
             <a:r>
-              <a:rPr lang="pt-BR" sz="1200" dirty="0" err="1">
+              <a:rPr lang="pt-BR" sz="1200">
                 <a:latin typeface="Poppins"/>
                 <a:cs typeface="Poppins"/>
               </a:rPr>
@@ -3205,7 +3205,7 @@
               <a:t> }} projetores em módulo de LED {{ </a:t>
             </a:r>
             <a:r>
-              <a:rPr lang="pt-BR" sz="1200" dirty="0" err="1">
+              <a:rPr lang="pt-BR" sz="1200">
                 <a:latin typeface="Poppins"/>
                 <a:cs typeface="Poppins"/>
               </a:rPr>
@@ -3243,7 +3243,7 @@
               <a:t>{{ </a:t>
             </a:r>
             <a:r>
-              <a:rPr lang="pt-BR" sz="1200" dirty="0" err="1">
+              <a:rPr lang="pt-BR" sz="1200">
                 <a:latin typeface="Poppins"/>
                 <a:cs typeface="Poppins"/>
               </a:rPr>
@@ -3257,7 +3257,7 @@
               <a:t> }} postes </a:t>
             </a:r>
             <a:r>
-              <a:rPr lang="pt-BR" sz="1200" dirty="0" err="1">
+              <a:rPr lang="pt-BR" sz="1200">
                 <a:latin typeface="Poppins"/>
                 <a:cs typeface="Poppins"/>
               </a:rPr>
@@ -3295,25 +3295,11 @@
               <a:t>{{ </a:t>
             </a:r>
             <a:r>
-              <a:rPr lang="pt-BR" sz="1200" dirty="0" err="1">
+              <a:rPr lang="pt-BR" sz="1200">
                 <a:latin typeface="Poppins"/>
                 <a:cs typeface="Poppins"/>
               </a:rPr>
-              <a:t>quantidade_cruzetas</a:t>
-            </a:r>
-            <a:r>
-              <a:rPr lang="pt-BR" sz="1200" dirty="0">
-                <a:latin typeface="Poppins"/>
-                <a:cs typeface="Poppins"/>
-              </a:rPr>
-              <a:t> }} cruzetas simples para </a:t>
-            </a:r>
-            <a:r>
-              <a:rPr lang="pt-BR" sz="1200" dirty="0" err="1">
-                <a:latin typeface="Poppins"/>
-                <a:cs typeface="Poppins"/>
-              </a:rPr>
-              <a:t>xx</a:t>
+              <a:t>quantidade_cruzetas }} cruzetas simples para {{ quantidade_postes_iluminacao }}</a:t>
             </a:r>
             <a:r>
               <a:rPr lang="pt-BR" sz="1200" dirty="0">

--- a/Backend/services/pptx-generator-service/slides/quadra_poli/secao_iluminacao.pptx
+++ b/Backend/services/pptx-generator-service/slides/quadra_poli/secao_iluminacao.pptx
@@ -3299,7 +3299,7 @@
                 <a:latin typeface="Poppins"/>
                 <a:cs typeface="Poppins"/>
               </a:rPr>
-              <a:t>quantidade_cruzetas }} cruzetas simples para {{ quantidade_postes_iluminacao }}</a:t>
+              <a:t>quantidade_cruzetas }} cruzetas simples para {{ quantidade_postes_iluminacao }}</a:t>
             </a:r>
             <a:r>
               <a:rPr lang="pt-BR" sz="1200" dirty="0">
